--- a/ucheba/pravovedenie-grk/Ст. 39 ГрК РФ — презентация.pptx
+++ b/ucheba/pravovedenie-grk/Ст. 39 ГрК РФ — презентация.pptx
@@ -601,7 +601,7 @@
           <a:p>
             <a:r>
               <a:rPr lang="en-US" dirty="0"/>
-              <a:t>Первый кейс — определение Конституционного Суда 2010 года. Жительница Петербурга после проигрыша в районном суде оспорила сами нормы статей 39 и 40 о публичных слушаниях. Конституционный Суд жалобу к рассмотрению не принял и сформулировал важную позицию: публичные слушания — не форма народовластия, а способ выявить мнение жителей, их итоги носят рекомендательный характер. Отсюда вывод, к которому я ещё вернусь: раз слушания не обязательны, вся защита держится на том, насколько обоснованно решение главы.</a:t>
+              <a:t>Первый кейс — позиция Верховного Суда. В 2018 году Президиум ВС утвердил обзор практики по спорам о видах разрешённого использования земли. Один из ключевых выводов: решение о разрешении на условно разрешённый вид — и даже отказ — нельзя принять в обход процедуры, то есть без общественных обсуждений или публичных слушаний. При этом Конституционный Суд ещё в 2010 году, в определении № 931-О-О, указал, что слушания — не форма народовластия и их итоги носят рекомендательный характер. Вместе эти позиции дают картину: процедура обязательна, но её результат главу не связывает. Значит, решает мотивировка — и это хорошо видно во втором кейсе.</a:t>
             </a:r>
             <a:endParaRPr lang="en-US" dirty="0"/>
           </a:p>
@@ -2932,7 +2932,7 @@
                 <a:ea typeface="Cambria" pitchFamily="34" charset="-122"/>
                 <a:cs typeface="Cambria" pitchFamily="34" charset="-120"/>
               </a:rPr>
-              <a:t>Определение КС РФ от 15.07.2010 № 931-О-О</a:t>
+              <a:t>Обзор практики ВС РФ от 14.11.2018</a:t>
             </a:r>
             <a:endParaRPr lang="en-US" sz="3000" dirty="0"/>
           </a:p>
@@ -3049,7 +3049,7 @@
                 <a:ea typeface="Calibri" pitchFamily="34" charset="-122"/>
                 <a:cs typeface="Calibri" pitchFamily="34" charset="-120"/>
               </a:rPr>
-              <a:t>Гражданка О. О. Андронова оспорила положения ст. 39 и 40 ГрК РФ о публичных слушаниях и законы Санкт-Петербурга о порядке их проведения</a:t>
+              <a:t>Президиум Верховного Суда РФ обобщил практику споров об изменении вида разрешённого использования земельных участков, в том числе о разрешениях по ст. 39</a:t>
             </a:r>
             <a:endParaRPr lang="en-US" sz="1600" dirty="0"/>
           </a:p>
@@ -3142,7 +3142,7 @@
                 <a:ea typeface="Calibri" pitchFamily="34" charset="-122"/>
                 <a:cs typeface="Calibri" pitchFamily="34" charset="-120"/>
               </a:rPr>
-              <a:t>ФАБУЛА</a:t>
+              <a:t>ЧТО ОБОБЩЕНО</a:t>
             </a:r>
             <a:endParaRPr lang="en-US" sz="1300" dirty="0"/>
           </a:p>
@@ -3181,7 +3181,7 @@
                 <a:ea typeface="Calibri" pitchFamily="34" charset="-122"/>
                 <a:cs typeface="Calibri" pitchFamily="34" charset="-120"/>
               </a:rPr>
-              <a:t>Красногвардейский районный суд Санкт-Петербурга отказал заявительнице в требованиях к администрации района (2009). Она обратилась в КС РФ, считая ч. 3–9 ст. 39 ГрК противоречащими Конституции, в том числе её статьям 3 и 130</a:t>
+              <a:t>Споры правообладателей с муниципалитетами: когда вид использования выбирают самостоятельно, когда нужно разрешение по ст. 39, а когда — изменение правил землепользования</a:t>
             </a:r>
             <a:endParaRPr lang="en-US" sz="1600" dirty="0"/>
           </a:p>
@@ -3313,7 +3313,7 @@
                 <a:ea typeface="Calibri" pitchFamily="34" charset="-122"/>
                 <a:cs typeface="Calibri" pitchFamily="34" charset="-120"/>
               </a:rPr>
-              <a:t>Публичные слушания не являются формой осуществления власти населением. Это способ выявить мнение жителей: их итоги учитываются, но носят рекомендательный характер</a:t>
+              <a:t>«Принятие решения о предоставлении разрешения… или об отказе в таком разрешении без соблюдения установленной законом процедуры, включая… общественные обсуждения или публичные слушания, не допускается»</a:t>
             </a:r>
             <a:endParaRPr lang="en-US" sz="1600" dirty="0"/>
           </a:p>
@@ -3445,7 +3445,7 @@
                 <a:ea typeface="Calibri" pitchFamily="34" charset="-122"/>
                 <a:cs typeface="Calibri" pitchFamily="34" charset="-120"/>
               </a:rPr>
-              <a:t>Жители не могут «заблокировать» решение через слушания. Поэтому главная гарантия — мотивировка решения и судебный контроль за ним</a:t>
+              <a:t>Ни разрешение, ни отказ нельзя «оформить» в обход жителей. Но сами обсуждения, по позиции КС РФ (№ 931-О-О), решение главы не предопределяют — всё решает мотивировка</a:t>
             </a:r>
             <a:endParaRPr lang="en-US" sz="1600" dirty="0"/>
           </a:p>
@@ -5727,7 +5727,7 @@
                 <a:ea typeface="Calibri" pitchFamily="34" charset="-122"/>
                 <a:cs typeface="Calibri" pitchFamily="34" charset="-120"/>
               </a:rPr>
-              <a:t>Позиция Конституционного Суда РФ и спор, дошедший до Верховного Суда РФ</a:t>
+              <a:t>Обзор практики Верховного Суда РФ и спор, дошедший до его Экономколлегии</a:t>
             </a:r>
             <a:endParaRPr lang="en-US" sz="1500" dirty="0"/>
           </a:p>
@@ -6683,7 +6683,7 @@
                 <a:ea typeface="Calibri" pitchFamily="34" charset="-122"/>
                 <a:cs typeface="Calibri" pitchFamily="34" charset="-120"/>
               </a:rPr>
-              <a:t>длятся общественные обсуждения или публичные слушания (ч. 6)</a:t>
+              <a:t>длятся общественные обсуждения или публичные слушания (ч. 7)</a:t>
             </a:r>
             <a:endParaRPr lang="en-US" sz="1500" dirty="0"/>
           </a:p>
@@ -7605,7 +7605,7 @@
                           <a:ea typeface="Calibri" pitchFamily="34" charset="-122"/>
                           <a:cs typeface="Calibri" pitchFamily="34" charset="-120"/>
                         </a:rPr>
-                        <a:t>5–7</a:t>
+                        <a:t>7, 10</a:t>
                       </a:r>
                       <a:endParaRPr lang="en-US" sz="1400" dirty="0">
                         <a:latin typeface="Calibri" charset="0"/>
@@ -7673,7 +7673,7 @@
                           <a:ea typeface="Calibri" pitchFamily="34" charset="-122"/>
                           <a:cs typeface="Calibri" pitchFamily="34" charset="-120"/>
                         </a:rPr>
-                        <a:t>Участники подают предложения и замечания; срок обсуждений — не более месяца; расходы несёт заявитель</a:t>
+                        <a:t>Срок обсуждений — не более месяца; расходы на них несёт заявитель (ч. 5 и 6 утратили силу в 2017 году)</a:t>
                       </a:r>
                       <a:endParaRPr lang="en-US" sz="1400" dirty="0">
                         <a:latin typeface="Calibri" charset="0"/>
@@ -7881,7 +7881,7 @@
                           <a:ea typeface="Calibri" pitchFamily="34" charset="-122"/>
                           <a:cs typeface="Calibri" pitchFamily="34" charset="-120"/>
                         </a:rPr>
-                        <a:t>10</a:t>
+                        <a:t>11, 11.1</a:t>
                       </a:r>
                       <a:endParaRPr lang="en-US" sz="1400" dirty="0">
                         <a:latin typeface="Calibri" charset="0"/>
@@ -7949,7 +7949,7 @@
                           <a:ea typeface="Calibri" pitchFamily="34" charset="-122"/>
                           <a:cs typeface="Calibri" pitchFamily="34" charset="-120"/>
                         </a:rPr>
-                        <a:t>Решение о разрешении или об отказе можно оспорить в суде</a:t>
+                        <a:t>Без обсуждений — если вид уже включён в регламент по инициативе заявителя; запрет — пока на участке не снесена выявленная самовольная постройка</a:t>
                       </a:r>
                       <a:endParaRPr lang="en-US" sz="1400" dirty="0">
                         <a:latin typeface="Calibri" charset="0"/>
@@ -8019,7 +8019,7 @@
                           <a:ea typeface="Calibri" pitchFamily="34" charset="-122"/>
                           <a:cs typeface="Calibri" pitchFamily="34" charset="-120"/>
                         </a:rPr>
-                        <a:t>11, 11.1</a:t>
+                        <a:t>12</a:t>
                       </a:r>
                       <a:endParaRPr lang="en-US" sz="1400" dirty="0">
                         <a:latin typeface="Calibri" charset="0"/>
@@ -8087,7 +8087,7 @@
                           <a:ea typeface="Calibri" pitchFamily="34" charset="-122"/>
                           <a:cs typeface="Calibri" pitchFamily="34" charset="-120"/>
                         </a:rPr>
-                        <a:t>Без обсуждений — если вид уже включён в регламент по инициативе заявителя; запрет — пока на участке не снесена выявленная самовольная постройка</a:t>
+                        <a:t>Решение о разрешении или об отказе можно оспорить в суде</a:t>
                       </a:r>
                       <a:endParaRPr lang="en-US" sz="1400" dirty="0">
                         <a:latin typeface="Calibri" charset="0"/>
@@ -11141,7 +11141,7 @@
                 <a:ea typeface="Calibri" pitchFamily="34" charset="-122"/>
                 <a:cs typeface="Calibri" pitchFamily="34" charset="-120"/>
               </a:rPr>
-              <a:t>Расходы на обсуждения несёт он сам (ч. 7)</a:t>
+              <a:t>Расходы на обсуждения несёт он сам (ч. 10)</a:t>
             </a:r>
             <a:endParaRPr lang="en-US" sz="1500" dirty="0"/>
           </a:p>
@@ -11450,7 +11450,7 @@
                 <a:ea typeface="Calibri" pitchFamily="34" charset="-122"/>
                 <a:cs typeface="Calibri" pitchFamily="34" charset="-120"/>
               </a:rPr>
-              <a:t>Итоги обсуждений носят рекомендательный характер (позиция КС РФ)</a:t>
+              <a:t>Итоги обсуждений носят рекомендательный характер (КС РФ, № 931-О-О)</a:t>
             </a:r>
             <a:endParaRPr lang="en-US" sz="1500" dirty="0"/>
           </a:p>
